--- a/docs/artifacts/presentation_weekly.pptx
+++ b/docs/artifacts/presentation_weekly.pptx
@@ -5002,7 +5002,7 @@
               </a:defRPr>
             </a:pPr>
             <a:r>
-              <a:t>• Природа остаточных ошибок 85% на 50°–90° имеет физическую структуру (апертурная дифракция на оправе).</a:t>
+              <a:t>• Дифракция на оправе ложна (апертура 4" = 101.6 мм при пучке 12 мм). Невязка 85% на 50°–90° связана с ограничением С/Ш детектора при глубоком затухании.</a:t>
             </a:r>
           </a:p>
           <a:p>
